--- a/Arquitetura do Software.pptx
+++ b/Arquitetura do Software.pptx
@@ -126,7 +126,7 @@
   <pc:docChgLst>
     <pc:chgData name="Leandro M Machado" userId="d82476bb6fadd58c" providerId="LiveId" clId="{A08595F5-0EB1-4D5B-95C0-C8D895760D55}"/>
     <pc:docChg chg="undo custSel addSld modSld">
-      <pc:chgData name="Leandro M Machado" userId="d82476bb6fadd58c" providerId="LiveId" clId="{A08595F5-0EB1-4D5B-95C0-C8D895760D55}" dt="2025-04-28T13:50:43.852" v="649" actId="14100"/>
+      <pc:chgData name="Leandro M Machado" userId="d82476bb6fadd58c" providerId="LiveId" clId="{A08595F5-0EB1-4D5B-95C0-C8D895760D55}" dt="2025-04-28T15:26:39.943" v="663" actId="20577"/>
       <pc:docMkLst>
         <pc:docMk/>
       </pc:docMkLst>
@@ -249,13 +249,13 @@
         </pc:picChg>
       </pc:sldChg>
       <pc:sldChg chg="addSp delSp modSp new mod">
-        <pc:chgData name="Leandro M Machado" userId="d82476bb6fadd58c" providerId="LiveId" clId="{A08595F5-0EB1-4D5B-95C0-C8D895760D55}" dt="2025-04-28T13:50:43.852" v="649" actId="14100"/>
+        <pc:chgData name="Leandro M Machado" userId="d82476bb6fadd58c" providerId="LiveId" clId="{A08595F5-0EB1-4D5B-95C0-C8D895760D55}" dt="2025-04-28T15:26:39.943" v="663" actId="20577"/>
         <pc:sldMkLst>
           <pc:docMk/>
           <pc:sldMk cId="2790638146" sldId="258"/>
         </pc:sldMkLst>
         <pc:spChg chg="mod">
-          <ac:chgData name="Leandro M Machado" userId="d82476bb6fadd58c" providerId="LiveId" clId="{A08595F5-0EB1-4D5B-95C0-C8D895760D55}" dt="2025-04-28T13:24:39.028" v="459"/>
+          <ac:chgData name="Leandro M Machado" userId="d82476bb6fadd58c" providerId="LiveId" clId="{A08595F5-0EB1-4D5B-95C0-C8D895760D55}" dt="2025-04-28T15:26:39.943" v="663" actId="20577"/>
           <ac:spMkLst>
             <pc:docMk/>
             <pc:sldMk cId="2790638146" sldId="258"/>
@@ -286,8 +286,8 @@
             <ac:picMk id="5" creationId="{3390B671-155B-40EC-4822-CF705D8D34DD}"/>
           </ac:picMkLst>
         </pc:picChg>
-        <pc:picChg chg="add mod">
-          <ac:chgData name="Leandro M Machado" userId="d82476bb6fadd58c" providerId="LiveId" clId="{A08595F5-0EB1-4D5B-95C0-C8D895760D55}" dt="2025-04-28T13:26:07.489" v="518" actId="1076"/>
+        <pc:picChg chg="add del mod">
+          <ac:chgData name="Leandro M Machado" userId="d82476bb6fadd58c" providerId="LiveId" clId="{A08595F5-0EB1-4D5B-95C0-C8D895760D55}" dt="2025-04-28T15:26:35.812" v="650" actId="478"/>
           <ac:picMkLst>
             <pc:docMk/>
             <pc:sldMk cId="2790638146" sldId="258"/>
@@ -4400,6 +4400,26 @@
               </a:rPr>
               <a:t>Módulos</a:t>
             </a:r>
+            <a:r>
+              <a:rPr lang="en-US" b="1" i="0" dirty="0">
+                <a:solidFill>
+                  <a:srgbClr val="D8DEE9"/>
+                </a:solidFill>
+                <a:effectLst/>
+                <a:latin typeface="Segoe WPC"/>
+              </a:rPr>
+              <a:t> </a:t>
+            </a:r>
+            <a:r>
+              <a:rPr lang="en-US" b="1" i="0" dirty="0" err="1">
+                <a:solidFill>
+                  <a:srgbClr val="D8DEE9"/>
+                </a:solidFill>
+                <a:effectLst/>
+                <a:latin typeface="Segoe WPC"/>
+              </a:rPr>
+              <a:t>implementada</a:t>
+            </a:r>
             <a:br>
               <a:rPr lang="en-US" b="1" i="0" dirty="0">
                 <a:solidFill>
@@ -4415,52 +4435,22 @@
       </p:sp>
       <p:pic>
         <p:nvPicPr>
-          <p:cNvPr id="7" name="Imagem 6">
-            <a:extLst>
-              <a:ext uri="{FF2B5EF4-FFF2-40B4-BE49-F238E27FC236}">
-                <a16:creationId xmlns:a16="http://schemas.microsoft.com/office/drawing/2014/main" id="{B86D8FD8-9CC0-7E13-C201-06D8A7D5ECBE}"/>
+          <p:cNvPr id="11" name="Espaço Reservado para Conteúdo 10">
+            <a:extLst>
+              <a:ext uri="{FF2B5EF4-FFF2-40B4-BE49-F238E27FC236}">
+                <a16:creationId xmlns:a16="http://schemas.microsoft.com/office/drawing/2014/main" id="{AF984A2B-80B3-A209-419B-748939C7348D}"/>
               </a:ext>
             </a:extLst>
           </p:cNvPr>
           <p:cNvPicPr>
-            <a:picLocks noChangeAspect="1"/>
+            <a:picLocks noGrp="1" noChangeAspect="1"/>
           </p:cNvPicPr>
-          <p:nvPr/>
+          <p:nvPr>
+            <p:ph idx="1"/>
+          </p:nvPr>
         </p:nvPicPr>
         <p:blipFill>
           <a:blip r:embed="rId2"/>
-          <a:stretch>
-            <a:fillRect/>
-          </a:stretch>
-        </p:blipFill>
-        <p:spPr>
-          <a:xfrm>
-            <a:off x="8178800" y="6371230"/>
-            <a:ext cx="4013200" cy="523846"/>
-          </a:xfrm>
-          <a:prstGeom prst="rect">
-            <a:avLst/>
-          </a:prstGeom>
-        </p:spPr>
-      </p:pic>
-      <p:pic>
-        <p:nvPicPr>
-          <p:cNvPr id="11" name="Espaço Reservado para Conteúdo 10">
-            <a:extLst>
-              <a:ext uri="{FF2B5EF4-FFF2-40B4-BE49-F238E27FC236}">
-                <a16:creationId xmlns:a16="http://schemas.microsoft.com/office/drawing/2014/main" id="{AF984A2B-80B3-A209-419B-748939C7348D}"/>
-              </a:ext>
-            </a:extLst>
-          </p:cNvPr>
-          <p:cNvPicPr>
-            <a:picLocks noGrp="1" noChangeAspect="1"/>
-          </p:cNvPicPr>
-          <p:nvPr>
-            <p:ph idx="1"/>
-          </p:nvPr>
-        </p:nvPicPr>
-        <p:blipFill>
-          <a:blip r:embed="rId3"/>
           <a:stretch>
             <a:fillRect/>
           </a:stretch>

--- a/Arquitetura do Software.pptx
+++ b/Arquitetura do Software.pptx
@@ -12,6 +12,7 @@
     <p:sldId id="260" r:id="rId6"/>
     <p:sldId id="261" r:id="rId7"/>
     <p:sldId id="262" r:id="rId8"/>
+    <p:sldId id="263" r:id="rId9"/>
   </p:sldIdLst>
   <p:sldSz cx="12192000" cy="6858000"/>
   <p:notesSz cx="6858000" cy="9144000"/>
@@ -110,6 +111,11 @@
       </a:defRPr>
     </a:lvl9pPr>
   </p:defaultTextStyle>
+  <p:extLst>
+    <p:ext uri="{EFAFB233-063F-42B5-8137-9DF3F51BA10A}">
+      <p15:sldGuideLst xmlns:p15="http://schemas.microsoft.com/office/powerpoint/2012/main"/>
+    </p:ext>
+  </p:extLst>
 </p:presentation>
 </file>
 
@@ -126,7 +132,7 @@
   <pc:docChgLst>
     <pc:chgData name="Leandro M Machado" userId="d82476bb6fadd58c" providerId="LiveId" clId="{A08595F5-0EB1-4D5B-95C0-C8D895760D55}"/>
     <pc:docChg chg="undo custSel addSld modSld">
-      <pc:chgData name="Leandro M Machado" userId="d82476bb6fadd58c" providerId="LiveId" clId="{A08595F5-0EB1-4D5B-95C0-C8D895760D55}" dt="2025-04-28T15:26:39.943" v="663" actId="20577"/>
+      <pc:chgData name="Leandro M Machado" userId="d82476bb6fadd58c" providerId="LiveId" clId="{A08595F5-0EB1-4D5B-95C0-C8D895760D55}" dt="2025-04-29T18:35:32.727" v="674" actId="20577"/>
       <pc:docMkLst>
         <pc:docMk/>
       </pc:docMkLst>
@@ -419,6 +425,29 @@
           </ac:picMkLst>
         </pc:picChg>
       </pc:sldChg>
+      <pc:sldChg chg="addSp modSp new mod">
+        <pc:chgData name="Leandro M Machado" userId="d82476bb6fadd58c" providerId="LiveId" clId="{A08595F5-0EB1-4D5B-95C0-C8D895760D55}" dt="2025-04-29T18:35:32.727" v="674" actId="20577"/>
+        <pc:sldMkLst>
+          <pc:docMk/>
+          <pc:sldMk cId="3235446394" sldId="263"/>
+        </pc:sldMkLst>
+        <pc:spChg chg="mod">
+          <ac:chgData name="Leandro M Machado" userId="d82476bb6fadd58c" providerId="LiveId" clId="{A08595F5-0EB1-4D5B-95C0-C8D895760D55}" dt="2025-04-29T18:35:32.727" v="674" actId="20577"/>
+          <ac:spMkLst>
+            <pc:docMk/>
+            <pc:sldMk cId="3235446394" sldId="263"/>
+            <ac:spMk id="3" creationId="{3067580E-73B4-2354-B890-E7DF4B649527}"/>
+          </ac:spMkLst>
+        </pc:spChg>
+        <pc:spChg chg="add mod">
+          <ac:chgData name="Leandro M Machado" userId="d82476bb6fadd58c" providerId="LiveId" clId="{A08595F5-0EB1-4D5B-95C0-C8D895760D55}" dt="2025-04-29T17:56:45.524" v="673" actId="255"/>
+          <ac:spMkLst>
+            <pc:docMk/>
+            <pc:sldMk cId="3235446394" sldId="263"/>
+            <ac:spMk id="5" creationId="{BB8E4AC1-F2B0-D2A4-2432-EB9AFA5B4A65}"/>
+          </ac:spMkLst>
+        </pc:spChg>
+      </pc:sldChg>
     </pc:docChg>
   </pc:docChgLst>
 </pc:chgInfo>
@@ -573,7 +602,7 @@
           <a:p>
             <a:fld id="{0C350148-ADD3-44A3-A2DD-196DFF6B6424}" type="datetimeFigureOut">
               <a:rPr lang="en-US" smtClean="0"/>
-              <a:t>4/28/2025</a:t>
+              <a:t>4/29/2025</a:t>
             </a:fld>
             <a:endParaRPr lang="en-US"/>
           </a:p>
@@ -773,7 +802,7 @@
           <a:p>
             <a:fld id="{0C350148-ADD3-44A3-A2DD-196DFF6B6424}" type="datetimeFigureOut">
               <a:rPr lang="en-US" smtClean="0"/>
-              <a:t>4/28/2025</a:t>
+              <a:t>4/29/2025</a:t>
             </a:fld>
             <a:endParaRPr lang="en-US"/>
           </a:p>
@@ -983,7 +1012,7 @@
           <a:p>
             <a:fld id="{0C350148-ADD3-44A3-A2DD-196DFF6B6424}" type="datetimeFigureOut">
               <a:rPr lang="en-US" smtClean="0"/>
-              <a:t>4/28/2025</a:t>
+              <a:t>4/29/2025</a:t>
             </a:fld>
             <a:endParaRPr lang="en-US"/>
           </a:p>
@@ -1183,7 +1212,7 @@
           <a:p>
             <a:fld id="{0C350148-ADD3-44A3-A2DD-196DFF6B6424}" type="datetimeFigureOut">
               <a:rPr lang="en-US" smtClean="0"/>
-              <a:t>4/28/2025</a:t>
+              <a:t>4/29/2025</a:t>
             </a:fld>
             <a:endParaRPr lang="en-US"/>
           </a:p>
@@ -1459,7 +1488,7 @@
           <a:p>
             <a:fld id="{0C350148-ADD3-44A3-A2DD-196DFF6B6424}" type="datetimeFigureOut">
               <a:rPr lang="en-US" smtClean="0"/>
-              <a:t>4/28/2025</a:t>
+              <a:t>4/29/2025</a:t>
             </a:fld>
             <a:endParaRPr lang="en-US"/>
           </a:p>
@@ -1727,7 +1756,7 @@
           <a:p>
             <a:fld id="{0C350148-ADD3-44A3-A2DD-196DFF6B6424}" type="datetimeFigureOut">
               <a:rPr lang="en-US" smtClean="0"/>
-              <a:t>4/28/2025</a:t>
+              <a:t>4/29/2025</a:t>
             </a:fld>
             <a:endParaRPr lang="en-US"/>
           </a:p>
@@ -2142,7 +2171,7 @@
           <a:p>
             <a:fld id="{0C350148-ADD3-44A3-A2DD-196DFF6B6424}" type="datetimeFigureOut">
               <a:rPr lang="en-US" smtClean="0"/>
-              <a:t>4/28/2025</a:t>
+              <a:t>4/29/2025</a:t>
             </a:fld>
             <a:endParaRPr lang="en-US"/>
           </a:p>
@@ -2284,7 +2313,7 @@
           <a:p>
             <a:fld id="{0C350148-ADD3-44A3-A2DD-196DFF6B6424}" type="datetimeFigureOut">
               <a:rPr lang="en-US" smtClean="0"/>
-              <a:t>4/28/2025</a:t>
+              <a:t>4/29/2025</a:t>
             </a:fld>
             <a:endParaRPr lang="en-US"/>
           </a:p>
@@ -2397,7 +2426,7 @@
           <a:p>
             <a:fld id="{0C350148-ADD3-44A3-A2DD-196DFF6B6424}" type="datetimeFigureOut">
               <a:rPr lang="en-US" smtClean="0"/>
-              <a:t>4/28/2025</a:t>
+              <a:t>4/29/2025</a:t>
             </a:fld>
             <a:endParaRPr lang="en-US"/>
           </a:p>
@@ -2710,7 +2739,7 @@
           <a:p>
             <a:fld id="{0C350148-ADD3-44A3-A2DD-196DFF6B6424}" type="datetimeFigureOut">
               <a:rPr lang="en-US" smtClean="0"/>
-              <a:t>4/28/2025</a:t>
+              <a:t>4/29/2025</a:t>
             </a:fld>
             <a:endParaRPr lang="en-US"/>
           </a:p>
@@ -2999,7 +3028,7 @@
           <a:p>
             <a:fld id="{0C350148-ADD3-44A3-A2DD-196DFF6B6424}" type="datetimeFigureOut">
               <a:rPr lang="en-US" smtClean="0"/>
-              <a:t>4/28/2025</a:t>
+              <a:t>4/29/2025</a:t>
             </a:fld>
             <a:endParaRPr lang="en-US"/>
           </a:p>
@@ -3242,7 +3271,7 @@
           <a:p>
             <a:fld id="{0C350148-ADD3-44A3-A2DD-196DFF6B6424}" type="datetimeFigureOut">
               <a:rPr lang="en-US" smtClean="0"/>
-              <a:t>4/28/2025</a:t>
+              <a:t>4/29/2025</a:t>
             </a:fld>
             <a:endParaRPr lang="en-US"/>
           </a:p>
@@ -5720,6 +5749,870 @@
     <p:extLst>
       <p:ext uri="{BB962C8B-B14F-4D97-AF65-F5344CB8AC3E}">
         <p14:creationId xmlns:p14="http://schemas.microsoft.com/office/powerpoint/2010/main" val="972724175"/>
+      </p:ext>
+    </p:extLst>
+  </p:cSld>
+  <p:clrMapOvr>
+    <a:masterClrMapping/>
+  </p:clrMapOvr>
+</p:sld>
+</file>
+
+<file path=ppt/slides/slide8.xml><?xml version="1.0" encoding="utf-8"?>
+<p:sld xmlns:a="http://schemas.openxmlformats.org/drawingml/2006/main" xmlns:r="http://schemas.openxmlformats.org/officeDocument/2006/relationships" xmlns:p="http://schemas.openxmlformats.org/presentationml/2006/main">
+  <p:cSld>
+    <p:spTree>
+      <p:nvGrpSpPr>
+        <p:cNvPr id="1" name=""/>
+        <p:cNvGrpSpPr/>
+        <p:nvPr/>
+      </p:nvGrpSpPr>
+      <p:grpSpPr>
+        <a:xfrm>
+          <a:off x="0" y="0"/>
+          <a:ext cx="0" cy="0"/>
+          <a:chOff x="0" y="0"/>
+          <a:chExt cx="0" cy="0"/>
+        </a:xfrm>
+      </p:grpSpPr>
+      <p:sp>
+        <p:nvSpPr>
+          <p:cNvPr id="2" name="Título 1">
+            <a:extLst>
+              <a:ext uri="{FF2B5EF4-FFF2-40B4-BE49-F238E27FC236}">
+                <a16:creationId xmlns:a16="http://schemas.microsoft.com/office/drawing/2014/main" id="{D15CBC08-5DDB-46A2-FCDD-474C2BE4D06E}"/>
+              </a:ext>
+            </a:extLst>
+          </p:cNvPr>
+          <p:cNvSpPr>
+            <a:spLocks noGrp="1"/>
+          </p:cNvSpPr>
+          <p:nvPr>
+            <p:ph type="title"/>
+          </p:nvPr>
+        </p:nvSpPr>
+        <p:spPr/>
+        <p:txBody>
+          <a:bodyPr/>
+          <a:lstStyle/>
+          <a:p>
+            <a:endParaRPr lang="en-US"/>
+          </a:p>
+        </p:txBody>
+      </p:sp>
+      <p:sp>
+        <p:nvSpPr>
+          <p:cNvPr id="3" name="Espaço Reservado para Conteúdo 2">
+            <a:extLst>
+              <a:ext uri="{FF2B5EF4-FFF2-40B4-BE49-F238E27FC236}">
+                <a16:creationId xmlns:a16="http://schemas.microsoft.com/office/drawing/2014/main" id="{3067580E-73B4-2354-B890-E7DF4B649527}"/>
+              </a:ext>
+            </a:extLst>
+          </p:cNvPr>
+          <p:cNvSpPr>
+            <a:spLocks noGrp="1"/>
+          </p:cNvSpPr>
+          <p:nvPr>
+            <p:ph idx="1"/>
+          </p:nvPr>
+        </p:nvSpPr>
+        <p:spPr>
+          <a:xfrm>
+            <a:off x="838200" y="1825625"/>
+            <a:ext cx="5257800" cy="4351338"/>
+          </a:xfrm>
+        </p:spPr>
+        <p:txBody>
+          <a:bodyPr>
+            <a:noAutofit/>
+          </a:bodyPr>
+          <a:lstStyle/>
+          <a:p>
+            <a:pPr>
+              <a:spcBef>
+                <a:spcPts val="150"/>
+              </a:spcBef>
+              <a:spcAft>
+                <a:spcPts val="150"/>
+              </a:spcAft>
+              <a:buFont typeface="+mj-lt"/>
+              <a:buAutoNum type="arabicPeriod"/>
+            </a:pPr>
+            <a:r>
+              <a:rPr lang="pt-BR" sz="1300" dirty="0"/>
+              <a:t>Para a aplicação de detecção e análise de vazamentos, além do filtro passa-banda e média móvel, existem várias técnicas de processamento de sinal que poderiam melhorar significativamente seus resultados:</a:t>
+            </a:r>
+          </a:p>
+          <a:p>
+            <a:pPr>
+              <a:spcBef>
+                <a:spcPts val="150"/>
+              </a:spcBef>
+              <a:spcAft>
+                <a:spcPts val="150"/>
+              </a:spcAft>
+              <a:buFont typeface="+mj-lt"/>
+              <a:buAutoNum type="arabicPeriod"/>
+            </a:pPr>
+            <a:r>
+              <a:rPr lang="pt-BR" sz="1300" b="1" dirty="0">
+                <a:effectLst/>
+              </a:rPr>
+              <a:t>Análise </a:t>
+            </a:r>
+            <a:r>
+              <a:rPr lang="pt-BR" sz="1300" b="1" dirty="0" err="1">
+                <a:effectLst/>
+              </a:rPr>
+              <a:t>wavelet</a:t>
+            </a:r>
+            <a:r>
+              <a:rPr lang="pt-BR" sz="1300" dirty="0">
+                <a:effectLst/>
+              </a:rPr>
+              <a:t>: Permite analisar o sinal em diferentes escalas de tempo e frequência simultaneamente, sendo excelente para detectar eventos transitórios característicos de vazamentos.</a:t>
+            </a:r>
+          </a:p>
+          <a:p>
+            <a:pPr>
+              <a:spcBef>
+                <a:spcPts val="150"/>
+              </a:spcBef>
+              <a:spcAft>
+                <a:spcPts val="150"/>
+              </a:spcAft>
+              <a:buFont typeface="+mj-lt"/>
+              <a:buAutoNum type="arabicPeriod" startAt="2"/>
+            </a:pPr>
+            <a:r>
+              <a:rPr lang="pt-BR" sz="1300" b="1" dirty="0">
+                <a:effectLst/>
+              </a:rPr>
+              <a:t>Análise no domínio da frequência</a:t>
+            </a:r>
+            <a:r>
+              <a:rPr lang="pt-BR" sz="1300" dirty="0">
+                <a:effectLst/>
+              </a:rPr>
+              <a:t>:</a:t>
+            </a:r>
+          </a:p>
+          <a:p>
+            <a:pPr>
+              <a:spcBef>
+                <a:spcPts val="150"/>
+              </a:spcBef>
+              <a:spcAft>
+                <a:spcPts val="150"/>
+              </a:spcAft>
+              <a:buFont typeface="Arial" panose="020B0604020202020204" pitchFamily="34" charset="0"/>
+              <a:buChar char="•"/>
+            </a:pPr>
+            <a:r>
+              <a:rPr lang="pt-BR" sz="1300" dirty="0">
+                <a:effectLst/>
+              </a:rPr>
+              <a:t>Transformada rápida de Fourier (FFT) mais avançada</a:t>
+            </a:r>
+          </a:p>
+          <a:p>
+            <a:pPr>
+              <a:spcBef>
+                <a:spcPts val="150"/>
+              </a:spcBef>
+              <a:spcAft>
+                <a:spcPts val="150"/>
+              </a:spcAft>
+              <a:buFont typeface="Arial" panose="020B0604020202020204" pitchFamily="34" charset="0"/>
+              <a:buChar char="•"/>
+            </a:pPr>
+            <a:r>
+              <a:rPr lang="pt-BR" sz="1300" dirty="0" err="1">
+                <a:effectLst/>
+              </a:rPr>
+              <a:t>Periodograma</a:t>
+            </a:r>
+            <a:r>
+              <a:rPr lang="pt-BR" sz="1300" dirty="0">
+                <a:effectLst/>
+              </a:rPr>
+              <a:t> de </a:t>
+            </a:r>
+            <a:r>
+              <a:rPr lang="pt-BR" sz="1300" dirty="0" err="1">
+                <a:effectLst/>
+              </a:rPr>
+              <a:t>Welch</a:t>
+            </a:r>
+            <a:r>
+              <a:rPr lang="pt-BR" sz="1300" dirty="0">
+                <a:effectLst/>
+              </a:rPr>
+              <a:t> para melhor estimativa do espectro</a:t>
+            </a:r>
+          </a:p>
+          <a:p>
+            <a:pPr>
+              <a:spcBef>
+                <a:spcPts val="150"/>
+              </a:spcBef>
+              <a:spcAft>
+                <a:spcPts val="150"/>
+              </a:spcAft>
+              <a:buFont typeface="Arial" panose="020B0604020202020204" pitchFamily="34" charset="0"/>
+              <a:buChar char="•"/>
+            </a:pPr>
+            <a:r>
+              <a:rPr lang="pt-BR" sz="1300" dirty="0">
+                <a:effectLst/>
+              </a:rPr>
+              <a:t>Espectrograma para visualizar mudanças na frequência ao longo do tempo</a:t>
+            </a:r>
+          </a:p>
+          <a:p>
+            <a:pPr>
+              <a:spcBef>
+                <a:spcPts val="150"/>
+              </a:spcBef>
+              <a:spcAft>
+                <a:spcPts val="150"/>
+              </a:spcAft>
+              <a:buFont typeface="+mj-lt"/>
+              <a:buAutoNum type="arabicPeriod" startAt="3"/>
+            </a:pPr>
+            <a:r>
+              <a:rPr lang="pt-BR" sz="1300" b="1" dirty="0">
+                <a:effectLst/>
+              </a:rPr>
+              <a:t>Técnicas de correlação</a:t>
+            </a:r>
+            <a:r>
+              <a:rPr lang="pt-BR" sz="1300" dirty="0">
+                <a:effectLst/>
+              </a:rPr>
+              <a:t>:</a:t>
+            </a:r>
+          </a:p>
+          <a:p>
+            <a:pPr>
+              <a:spcBef>
+                <a:spcPts val="150"/>
+              </a:spcBef>
+              <a:spcAft>
+                <a:spcPts val="150"/>
+              </a:spcAft>
+              <a:buFont typeface="Arial" panose="020B0604020202020204" pitchFamily="34" charset="0"/>
+              <a:buChar char="•"/>
+            </a:pPr>
+            <a:r>
+              <a:rPr lang="pt-BR" sz="1300" dirty="0">
+                <a:effectLst/>
+              </a:rPr>
+              <a:t>Autocorrelação para detectar periodicidades no sinal</a:t>
+            </a:r>
+          </a:p>
+          <a:p>
+            <a:pPr>
+              <a:spcBef>
+                <a:spcPts val="150"/>
+              </a:spcBef>
+              <a:spcAft>
+                <a:spcPts val="150"/>
+              </a:spcAft>
+              <a:buFont typeface="Arial" panose="020B0604020202020204" pitchFamily="34" charset="0"/>
+              <a:buChar char="•"/>
+            </a:pPr>
+            <a:r>
+              <a:rPr lang="pt-BR" sz="1300" dirty="0">
+                <a:effectLst/>
+              </a:rPr>
+              <a:t>Correlação cruzada para comparar sinais de diferentes sensores</a:t>
+            </a:r>
+          </a:p>
+          <a:p>
+            <a:pPr>
+              <a:spcBef>
+                <a:spcPts val="150"/>
+              </a:spcBef>
+              <a:spcAft>
+                <a:spcPts val="150"/>
+              </a:spcAft>
+              <a:buFont typeface="+mj-lt"/>
+              <a:buAutoNum type="arabicPeriod" startAt="4"/>
+            </a:pPr>
+            <a:r>
+              <a:rPr lang="pt-BR" sz="1300" b="1" dirty="0">
+                <a:effectLst/>
+              </a:rPr>
+              <a:t>Remoção de ruído adaptativa</a:t>
+            </a:r>
+            <a:r>
+              <a:rPr lang="pt-BR" sz="1300" dirty="0">
+                <a:effectLst/>
+              </a:rPr>
+              <a:t>:</a:t>
+            </a:r>
+          </a:p>
+          <a:p>
+            <a:pPr>
+              <a:spcBef>
+                <a:spcPts val="150"/>
+              </a:spcBef>
+              <a:spcAft>
+                <a:spcPts val="150"/>
+              </a:spcAft>
+              <a:buFont typeface="Arial" panose="020B0604020202020204" pitchFamily="34" charset="0"/>
+              <a:buChar char="•"/>
+            </a:pPr>
+            <a:r>
+              <a:rPr lang="pt-BR" sz="1300" dirty="0">
+                <a:effectLst/>
+              </a:rPr>
+              <a:t>Filtros adaptativos como LMS (</a:t>
+            </a:r>
+            <a:r>
+              <a:rPr lang="pt-BR" sz="1300" dirty="0" err="1">
+                <a:effectLst/>
+              </a:rPr>
+              <a:t>Least</a:t>
+            </a:r>
+            <a:r>
+              <a:rPr lang="pt-BR" sz="1300" dirty="0">
+                <a:effectLst/>
+              </a:rPr>
+              <a:t> </a:t>
+            </a:r>
+            <a:r>
+              <a:rPr lang="pt-BR" sz="1300" dirty="0" err="1">
+                <a:effectLst/>
+              </a:rPr>
+              <a:t>Mean</a:t>
+            </a:r>
+            <a:r>
+              <a:rPr lang="pt-BR" sz="1300" dirty="0">
+                <a:effectLst/>
+              </a:rPr>
+              <a:t> Square)</a:t>
+            </a:r>
+          </a:p>
+          <a:p>
+            <a:pPr>
+              <a:spcBef>
+                <a:spcPts val="150"/>
+              </a:spcBef>
+              <a:spcAft>
+                <a:spcPts val="150"/>
+              </a:spcAft>
+              <a:buFont typeface="Arial" panose="020B0604020202020204" pitchFamily="34" charset="0"/>
+              <a:buChar char="•"/>
+            </a:pPr>
+            <a:r>
+              <a:rPr lang="pt-BR" sz="1300" dirty="0">
+                <a:effectLst/>
+              </a:rPr>
+              <a:t>Decomposição de modo empírico (EMD)</a:t>
+            </a:r>
+          </a:p>
+          <a:p>
+            <a:pPr>
+              <a:spcBef>
+                <a:spcPts val="150"/>
+              </a:spcBef>
+              <a:spcAft>
+                <a:spcPts val="150"/>
+              </a:spcAft>
+              <a:buFont typeface="Arial" panose="020B0604020202020204" pitchFamily="34" charset="0"/>
+              <a:buChar char="•"/>
+            </a:pPr>
+            <a:r>
+              <a:rPr lang="pt-BR" sz="1300" dirty="0">
+                <a:effectLst/>
+              </a:rPr>
+              <a:t>Filtro </a:t>
+            </a:r>
+            <a:r>
+              <a:rPr lang="pt-BR" sz="1300" dirty="0" err="1">
+                <a:effectLst/>
+              </a:rPr>
+              <a:t>Kalman</a:t>
+            </a:r>
+            <a:r>
+              <a:rPr lang="pt-BR" sz="1300" dirty="0">
+                <a:effectLst/>
+              </a:rPr>
+              <a:t> para rastreamento de componentes do sinal</a:t>
+            </a:r>
+          </a:p>
+          <a:p>
+            <a:pPr>
+              <a:spcBef>
+                <a:spcPts val="150"/>
+              </a:spcBef>
+              <a:spcAft>
+                <a:spcPts val="150"/>
+              </a:spcAft>
+              <a:buFont typeface="+mj-lt"/>
+              <a:buAutoNum type="arabicPeriod" startAt="5"/>
+            </a:pPr>
+            <a:r>
+              <a:rPr lang="pt-BR" sz="1300" b="1" dirty="0">
+                <a:effectLst/>
+              </a:rPr>
+              <a:t>Técnicas estatísticas</a:t>
+            </a:r>
+            <a:r>
+              <a:rPr lang="pt-BR" sz="1300" dirty="0">
+                <a:effectLst/>
+              </a:rPr>
+              <a:t>:</a:t>
+            </a:r>
+          </a:p>
+          <a:p>
+            <a:pPr>
+              <a:spcBef>
+                <a:spcPts val="150"/>
+              </a:spcBef>
+              <a:spcAft>
+                <a:spcPts val="150"/>
+              </a:spcAft>
+              <a:buFont typeface="Arial" panose="020B0604020202020204" pitchFamily="34" charset="0"/>
+              <a:buChar char="•"/>
+            </a:pPr>
+            <a:r>
+              <a:rPr lang="pt-BR" sz="1300" dirty="0">
+                <a:effectLst/>
+              </a:rPr>
+              <a:t>Análise de componentes principais (PCA)</a:t>
+            </a:r>
+          </a:p>
+          <a:p>
+            <a:pPr>
+              <a:spcBef>
+                <a:spcPts val="150"/>
+              </a:spcBef>
+              <a:spcAft>
+                <a:spcPts val="150"/>
+              </a:spcAft>
+              <a:buFont typeface="Arial" panose="020B0604020202020204" pitchFamily="34" charset="0"/>
+              <a:buChar char="•"/>
+            </a:pPr>
+            <a:r>
+              <a:rPr lang="pt-BR" sz="1300" dirty="0">
+                <a:effectLst/>
+              </a:rPr>
+              <a:t>Detecção de outliers usando métodos estatísticos robustos</a:t>
+            </a:r>
+          </a:p>
+          <a:p>
+            <a:pPr>
+              <a:spcBef>
+                <a:spcPts val="150"/>
+              </a:spcBef>
+              <a:spcAft>
+                <a:spcPts val="150"/>
+              </a:spcAft>
+              <a:buFont typeface="Arial" panose="020B0604020202020204" pitchFamily="34" charset="0"/>
+              <a:buChar char="•"/>
+            </a:pPr>
+            <a:r>
+              <a:rPr lang="pt-BR" sz="1300" dirty="0">
+                <a:effectLst/>
+              </a:rPr>
+              <a:t>Método CUSUM para detecção de mudanças no sinal</a:t>
+            </a:r>
+          </a:p>
+          <a:p>
+            <a:endParaRPr lang="en-US" sz="1300" dirty="0"/>
+          </a:p>
+        </p:txBody>
+      </p:sp>
+      <p:sp>
+        <p:nvSpPr>
+          <p:cNvPr id="5" name="CaixaDeTexto 4">
+            <a:extLst>
+              <a:ext uri="{FF2B5EF4-FFF2-40B4-BE49-F238E27FC236}">
+                <a16:creationId xmlns:a16="http://schemas.microsoft.com/office/drawing/2014/main" id="{BB8E4AC1-F2B0-D2A4-2432-EB9AFA5B4A65}"/>
+              </a:ext>
+            </a:extLst>
+          </p:cNvPr>
+          <p:cNvSpPr txBox="1"/>
+          <p:nvPr/>
+        </p:nvSpPr>
+        <p:spPr>
+          <a:xfrm>
+            <a:off x="6096000" y="1825625"/>
+            <a:ext cx="6096000" cy="4314001"/>
+          </a:xfrm>
+          <a:prstGeom prst="rect">
+            <a:avLst/>
+          </a:prstGeom>
+          <a:noFill/>
+        </p:spPr>
+        <p:txBody>
+          <a:bodyPr wrap="square">
+            <a:spAutoFit/>
+          </a:bodyPr>
+          <a:lstStyle/>
+          <a:p>
+            <a:pPr>
+              <a:spcBef>
+                <a:spcPts val="150"/>
+              </a:spcBef>
+              <a:spcAft>
+                <a:spcPts val="150"/>
+              </a:spcAft>
+              <a:buFont typeface="+mj-lt"/>
+              <a:buAutoNum type="arabicPeriod" startAt="6"/>
+            </a:pPr>
+            <a:r>
+              <a:rPr lang="pt-BR" sz="1300" b="1" dirty="0">
+                <a:effectLst/>
+              </a:rPr>
+              <a:t>Detecção de eventos</a:t>
+            </a:r>
+            <a:r>
+              <a:rPr lang="pt-BR" sz="1300" dirty="0">
+                <a:effectLst/>
+              </a:rPr>
+              <a:t>:</a:t>
+            </a:r>
+          </a:p>
+          <a:p>
+            <a:pPr>
+              <a:spcBef>
+                <a:spcPts val="150"/>
+              </a:spcBef>
+              <a:spcAft>
+                <a:spcPts val="150"/>
+              </a:spcAft>
+              <a:buFont typeface="Arial" panose="020B0604020202020204" pitchFamily="34" charset="0"/>
+              <a:buChar char="•"/>
+            </a:pPr>
+            <a:r>
+              <a:rPr lang="pt-BR" sz="1300" dirty="0">
+                <a:effectLst/>
+              </a:rPr>
+              <a:t>Algoritmos de detecção de picos</a:t>
+            </a:r>
+          </a:p>
+          <a:p>
+            <a:pPr>
+              <a:spcBef>
+                <a:spcPts val="150"/>
+              </a:spcBef>
+              <a:spcAft>
+                <a:spcPts val="150"/>
+              </a:spcAft>
+              <a:buFont typeface="Arial" panose="020B0604020202020204" pitchFamily="34" charset="0"/>
+              <a:buChar char="•"/>
+            </a:pPr>
+            <a:r>
+              <a:rPr lang="pt-BR" sz="1300" dirty="0">
+                <a:effectLst/>
+              </a:rPr>
+              <a:t>Detecção de início/fim de transientes</a:t>
+            </a:r>
+          </a:p>
+          <a:p>
+            <a:pPr>
+              <a:spcBef>
+                <a:spcPts val="150"/>
+              </a:spcBef>
+              <a:spcAft>
+                <a:spcPts val="150"/>
+              </a:spcAft>
+              <a:buFont typeface="Arial" panose="020B0604020202020204" pitchFamily="34" charset="0"/>
+              <a:buChar char="•"/>
+            </a:pPr>
+            <a:r>
+              <a:rPr lang="pt-BR" sz="1300" dirty="0">
+                <a:effectLst/>
+              </a:rPr>
+              <a:t>Segmentação do sinal</a:t>
+            </a:r>
+          </a:p>
+          <a:p>
+            <a:pPr>
+              <a:spcBef>
+                <a:spcPts val="150"/>
+              </a:spcBef>
+              <a:spcAft>
+                <a:spcPts val="150"/>
+              </a:spcAft>
+              <a:buFont typeface="+mj-lt"/>
+              <a:buAutoNum type="arabicPeriod" startAt="7"/>
+            </a:pPr>
+            <a:r>
+              <a:rPr lang="pt-BR" sz="1300" b="1" dirty="0">
+                <a:effectLst/>
+              </a:rPr>
+              <a:t>Classificação e aprendizado de máquina</a:t>
+            </a:r>
+            <a:r>
+              <a:rPr lang="pt-BR" sz="1300" dirty="0">
+                <a:effectLst/>
+              </a:rPr>
+              <a:t>:</a:t>
+            </a:r>
+          </a:p>
+          <a:p>
+            <a:pPr>
+              <a:spcBef>
+                <a:spcPts val="150"/>
+              </a:spcBef>
+              <a:spcAft>
+                <a:spcPts val="150"/>
+              </a:spcAft>
+              <a:buFont typeface="Arial" panose="020B0604020202020204" pitchFamily="34" charset="0"/>
+              <a:buChar char="•"/>
+            </a:pPr>
+            <a:r>
+              <a:rPr lang="pt-BR" sz="1300" dirty="0">
+                <a:effectLst/>
+              </a:rPr>
+              <a:t>Extração de características do sinal (energia, entropia, momentos estatísticos)</a:t>
+            </a:r>
+          </a:p>
+          <a:p>
+            <a:pPr>
+              <a:spcBef>
+                <a:spcPts val="150"/>
+              </a:spcBef>
+              <a:spcAft>
+                <a:spcPts val="150"/>
+              </a:spcAft>
+              <a:buFont typeface="Arial" panose="020B0604020202020204" pitchFamily="34" charset="0"/>
+              <a:buChar char="•"/>
+            </a:pPr>
+            <a:r>
+              <a:rPr lang="pt-BR" sz="1300" dirty="0" err="1">
+                <a:effectLst/>
+              </a:rPr>
+              <a:t>Support</a:t>
+            </a:r>
+            <a:r>
+              <a:rPr lang="pt-BR" sz="1300" dirty="0">
+                <a:effectLst/>
+              </a:rPr>
+              <a:t> Vector </a:t>
+            </a:r>
+            <a:r>
+              <a:rPr lang="pt-BR" sz="1300" dirty="0" err="1">
+                <a:effectLst/>
+              </a:rPr>
+              <a:t>Machines</a:t>
+            </a:r>
+            <a:r>
+              <a:rPr lang="pt-BR" sz="1300" dirty="0">
+                <a:effectLst/>
+              </a:rPr>
+              <a:t> (SVM) para classificação</a:t>
+            </a:r>
+          </a:p>
+          <a:p>
+            <a:pPr>
+              <a:spcBef>
+                <a:spcPts val="150"/>
+              </a:spcBef>
+              <a:spcAft>
+                <a:spcPts val="150"/>
+              </a:spcAft>
+              <a:buFont typeface="Arial" panose="020B0604020202020204" pitchFamily="34" charset="0"/>
+              <a:buChar char="•"/>
+            </a:pPr>
+            <a:r>
+              <a:rPr lang="pt-BR" sz="1300" dirty="0">
+                <a:effectLst/>
+              </a:rPr>
+              <a:t>Redes neurais para reconhecimento de padrões de vazamento</a:t>
+            </a:r>
+          </a:p>
+          <a:p>
+            <a:pPr>
+              <a:spcBef>
+                <a:spcPts val="150"/>
+              </a:spcBef>
+              <a:spcAft>
+                <a:spcPts val="150"/>
+              </a:spcAft>
+              <a:buFont typeface="+mj-lt"/>
+              <a:buAutoNum type="arabicPeriod" startAt="8"/>
+            </a:pPr>
+            <a:r>
+              <a:rPr lang="pt-BR" sz="1300" b="1" dirty="0">
+                <a:effectLst/>
+              </a:rPr>
+              <a:t>Métodos de demodulação avançados</a:t>
+            </a:r>
+            <a:r>
+              <a:rPr lang="pt-BR" sz="1300" dirty="0">
+                <a:effectLst/>
+              </a:rPr>
+              <a:t>:</a:t>
+            </a:r>
+          </a:p>
+          <a:p>
+            <a:pPr>
+              <a:spcBef>
+                <a:spcPts val="150"/>
+              </a:spcBef>
+              <a:spcAft>
+                <a:spcPts val="150"/>
+              </a:spcAft>
+              <a:buFont typeface="Arial" panose="020B0604020202020204" pitchFamily="34" charset="0"/>
+              <a:buChar char="•"/>
+            </a:pPr>
+            <a:r>
+              <a:rPr lang="pt-BR" sz="1300" dirty="0">
+                <a:effectLst/>
+              </a:rPr>
+              <a:t>Demodulação de Hilbert mais refinada</a:t>
+            </a:r>
+          </a:p>
+          <a:p>
+            <a:pPr>
+              <a:spcBef>
+                <a:spcPts val="150"/>
+              </a:spcBef>
+              <a:spcAft>
+                <a:spcPts val="150"/>
+              </a:spcAft>
+              <a:buFont typeface="Arial" panose="020B0604020202020204" pitchFamily="34" charset="0"/>
+              <a:buChar char="•"/>
+            </a:pPr>
+            <a:r>
+              <a:rPr lang="pt-BR" sz="1300" dirty="0">
+                <a:effectLst/>
+              </a:rPr>
+              <a:t>Decomposição em modos empíricos (EMD) com subsequente análise de Hilbert</a:t>
+            </a:r>
+          </a:p>
+          <a:p>
+            <a:pPr>
+              <a:spcBef>
+                <a:spcPts val="150"/>
+              </a:spcBef>
+              <a:spcAft>
+                <a:spcPts val="150"/>
+              </a:spcAft>
+              <a:buFont typeface="+mj-lt"/>
+              <a:buAutoNum type="arabicPeriod" startAt="9"/>
+            </a:pPr>
+            <a:r>
+              <a:rPr lang="pt-BR" sz="1300" b="1" dirty="0">
+                <a:effectLst/>
+              </a:rPr>
+              <a:t>Técnicas de fusão de sensores</a:t>
+            </a:r>
+            <a:r>
+              <a:rPr lang="pt-BR" sz="1300" dirty="0">
+                <a:effectLst/>
+              </a:rPr>
+              <a:t>:</a:t>
+            </a:r>
+          </a:p>
+          <a:p>
+            <a:pPr>
+              <a:spcBef>
+                <a:spcPts val="150"/>
+              </a:spcBef>
+              <a:spcAft>
+                <a:spcPts val="150"/>
+              </a:spcAft>
+              <a:buFont typeface="Arial" panose="020B0604020202020204" pitchFamily="34" charset="0"/>
+              <a:buChar char="•"/>
+            </a:pPr>
+            <a:r>
+              <a:rPr lang="pt-BR" sz="1300" dirty="0">
+                <a:effectLst/>
+              </a:rPr>
+              <a:t>Combinação de informações de múltiplos sensores</a:t>
+            </a:r>
+          </a:p>
+          <a:p>
+            <a:pPr>
+              <a:spcBef>
+                <a:spcPts val="150"/>
+              </a:spcBef>
+              <a:spcAft>
+                <a:spcPts val="150"/>
+              </a:spcAft>
+              <a:buFont typeface="Arial" panose="020B0604020202020204" pitchFamily="34" charset="0"/>
+              <a:buChar char="•"/>
+            </a:pPr>
+            <a:r>
+              <a:rPr lang="pt-BR" sz="1300" dirty="0">
+                <a:effectLst/>
+              </a:rPr>
+              <a:t>Algoritmos de fusão de dados</a:t>
+            </a:r>
+          </a:p>
+          <a:p>
+            <a:pPr>
+              <a:spcBef>
+                <a:spcPts val="150"/>
+              </a:spcBef>
+              <a:spcAft>
+                <a:spcPts val="150"/>
+              </a:spcAft>
+              <a:buFont typeface="+mj-lt"/>
+              <a:buAutoNum type="arabicPeriod" startAt="10"/>
+            </a:pPr>
+            <a:r>
+              <a:rPr lang="pt-BR" sz="1300" b="1" dirty="0">
+                <a:effectLst/>
+              </a:rPr>
+              <a:t>Análise de envelope</a:t>
+            </a:r>
+            <a:r>
+              <a:rPr lang="pt-BR" sz="1300" dirty="0">
+                <a:effectLst/>
+              </a:rPr>
+              <a:t>:</a:t>
+            </a:r>
+          </a:p>
+          <a:p>
+            <a:pPr>
+              <a:spcBef>
+                <a:spcPts val="150"/>
+              </a:spcBef>
+              <a:spcAft>
+                <a:spcPts val="150"/>
+              </a:spcAft>
+              <a:buFont typeface="Arial" panose="020B0604020202020204" pitchFamily="34" charset="0"/>
+              <a:buChar char="•"/>
+            </a:pPr>
+            <a:r>
+              <a:rPr lang="pt-BR" sz="1300" dirty="0">
+                <a:effectLst/>
+              </a:rPr>
+              <a:t>Particularmente útil para detecção de impactos e transientes</a:t>
+            </a:r>
+          </a:p>
+          <a:p>
+            <a:pPr>
+              <a:spcBef>
+                <a:spcPts val="150"/>
+              </a:spcBef>
+              <a:spcAft>
+                <a:spcPts val="150"/>
+              </a:spcAft>
+              <a:buFont typeface="Arial" panose="020B0604020202020204" pitchFamily="34" charset="0"/>
+              <a:buChar char="•"/>
+            </a:pPr>
+            <a:r>
+              <a:rPr lang="pt-BR" sz="1300" dirty="0">
+                <a:effectLst/>
+              </a:rPr>
+              <a:t>Detecção de modulação de amplitude no sinal</a:t>
+            </a:r>
+          </a:p>
+        </p:txBody>
+      </p:sp>
+    </p:spTree>
+    <p:extLst>
+      <p:ext uri="{BB962C8B-B14F-4D97-AF65-F5344CB8AC3E}">
+        <p14:creationId xmlns:p14="http://schemas.microsoft.com/office/powerpoint/2010/main" val="3235446394"/>
       </p:ext>
     </p:extLst>
   </p:cSld>
